--- a/docs/lesson/6.1-mth361-conditional-probability-and-bayes-theorem/sampling-wwo-replacement.pptx
+++ b/docs/lesson/6.1-mth361-conditional-probability-and-bayes-theorem/sampling-wwo-replacement.pptx
@@ -244,7 +244,7 @@
           <a:p>
             <a:fld id="{79605B10-B3A1-46C7-96D9-1C0B7551EF3F}" type="datetimeFigureOut">
               <a:rPr lang="en-US" smtClean="0"/>
-              <a:t>3/19/2026</a:t>
+              <a:t>3/20/2026</a:t>
             </a:fld>
             <a:endParaRPr lang="en-US"/>
           </a:p>
@@ -414,7 +414,7 @@
           <a:p>
             <a:fld id="{79605B10-B3A1-46C7-96D9-1C0B7551EF3F}" type="datetimeFigureOut">
               <a:rPr lang="en-US" smtClean="0"/>
-              <a:t>3/19/2026</a:t>
+              <a:t>3/20/2026</a:t>
             </a:fld>
             <a:endParaRPr lang="en-US"/>
           </a:p>
@@ -594,7 +594,7 @@
           <a:p>
             <a:fld id="{79605B10-B3A1-46C7-96D9-1C0B7551EF3F}" type="datetimeFigureOut">
               <a:rPr lang="en-US" smtClean="0"/>
-              <a:t>3/19/2026</a:t>
+              <a:t>3/20/2026</a:t>
             </a:fld>
             <a:endParaRPr lang="en-US"/>
           </a:p>
@@ -764,7 +764,7 @@
           <a:p>
             <a:fld id="{79605B10-B3A1-46C7-96D9-1C0B7551EF3F}" type="datetimeFigureOut">
               <a:rPr lang="en-US" smtClean="0"/>
-              <a:t>3/19/2026</a:t>
+              <a:t>3/20/2026</a:t>
             </a:fld>
             <a:endParaRPr lang="en-US"/>
           </a:p>
@@ -1008,7 +1008,7 @@
           <a:p>
             <a:fld id="{79605B10-B3A1-46C7-96D9-1C0B7551EF3F}" type="datetimeFigureOut">
               <a:rPr lang="en-US" smtClean="0"/>
-              <a:t>3/19/2026</a:t>
+              <a:t>3/20/2026</a:t>
             </a:fld>
             <a:endParaRPr lang="en-US"/>
           </a:p>
@@ -1240,7 +1240,7 @@
           <a:p>
             <a:fld id="{79605B10-B3A1-46C7-96D9-1C0B7551EF3F}" type="datetimeFigureOut">
               <a:rPr lang="en-US" smtClean="0"/>
-              <a:t>3/19/2026</a:t>
+              <a:t>3/20/2026</a:t>
             </a:fld>
             <a:endParaRPr lang="en-US"/>
           </a:p>
@@ -1607,7 +1607,7 @@
           <a:p>
             <a:fld id="{79605B10-B3A1-46C7-96D9-1C0B7551EF3F}" type="datetimeFigureOut">
               <a:rPr lang="en-US" smtClean="0"/>
-              <a:t>3/19/2026</a:t>
+              <a:t>3/20/2026</a:t>
             </a:fld>
             <a:endParaRPr lang="en-US"/>
           </a:p>
@@ -1725,7 +1725,7 @@
           <a:p>
             <a:fld id="{79605B10-B3A1-46C7-96D9-1C0B7551EF3F}" type="datetimeFigureOut">
               <a:rPr lang="en-US" smtClean="0"/>
-              <a:t>3/19/2026</a:t>
+              <a:t>3/20/2026</a:t>
             </a:fld>
             <a:endParaRPr lang="en-US"/>
           </a:p>
@@ -1820,7 +1820,7 @@
           <a:p>
             <a:fld id="{79605B10-B3A1-46C7-96D9-1C0B7551EF3F}" type="datetimeFigureOut">
               <a:rPr lang="en-US" smtClean="0"/>
-              <a:t>3/19/2026</a:t>
+              <a:t>3/20/2026</a:t>
             </a:fld>
             <a:endParaRPr lang="en-US"/>
           </a:p>
@@ -2097,7 +2097,7 @@
           <a:p>
             <a:fld id="{79605B10-B3A1-46C7-96D9-1C0B7551EF3F}" type="datetimeFigureOut">
               <a:rPr lang="en-US" smtClean="0"/>
-              <a:t>3/19/2026</a:t>
+              <a:t>3/20/2026</a:t>
             </a:fld>
             <a:endParaRPr lang="en-US"/>
           </a:p>
@@ -2354,7 +2354,7 @@
           <a:p>
             <a:fld id="{79605B10-B3A1-46C7-96D9-1C0B7551EF3F}" type="datetimeFigureOut">
               <a:rPr lang="en-US" smtClean="0"/>
-              <a:t>3/19/2026</a:t>
+              <a:t>3/20/2026</a:t>
             </a:fld>
             <a:endParaRPr lang="en-US"/>
           </a:p>
@@ -2567,7 +2567,7 @@
           <a:p>
             <a:fld id="{79605B10-B3A1-46C7-96D9-1C0B7551EF3F}" type="datetimeFigureOut">
               <a:rPr lang="en-US" smtClean="0"/>
-              <a:t>3/19/2026</a:t>
+              <a:t>3/20/2026</a:t>
             </a:fld>
             <a:endParaRPr lang="en-US"/>
           </a:p>
@@ -6190,8 +6190,8 @@
           </a:fontRef>
         </p:style>
       </p:cxnSp>
-      <mc:AlternateContent xmlns:mc="http://schemas.openxmlformats.org/markup-compatibility/2006">
-        <mc:Choice xmlns:a14="http://schemas.microsoft.com/office/drawing/2010/main" Requires="a14">
+      <mc:AlternateContent xmlns:mc="http://schemas.openxmlformats.org/markup-compatibility/2006" xmlns:a14="http://schemas.microsoft.com/office/drawing/2010/main">
+        <mc:Choice Requires="a14">
           <p:sp>
             <p:nvSpPr>
               <p:cNvPr id="132" name="TextBox 131">
@@ -6242,7 +6242,7 @@
             </p:txBody>
           </p:sp>
         </mc:Choice>
-        <mc:Fallback>
+        <mc:Fallback xmlns="">
           <p:sp>
             <p:nvSpPr>
               <p:cNvPr id="132" name="TextBox 131">
@@ -7157,8 +7157,8 @@
           </a:p>
         </p:txBody>
       </p:sp>
-      <mc:AlternateContent xmlns:mc="http://schemas.openxmlformats.org/markup-compatibility/2006">
-        <mc:Choice xmlns:a14="http://schemas.microsoft.com/office/drawing/2010/main" Requires="a14">
+      <mc:AlternateContent xmlns:mc="http://schemas.openxmlformats.org/markup-compatibility/2006" xmlns:a14="http://schemas.microsoft.com/office/drawing/2010/main">
+        <mc:Choice Requires="a14">
           <p:sp>
             <p:nvSpPr>
               <p:cNvPr id="161" name="TextBox 160">
@@ -7209,7 +7209,7 @@
             </p:txBody>
           </p:sp>
         </mc:Choice>
-        <mc:Fallback>
+        <mc:Fallback xmlns="">
           <p:sp>
             <p:nvSpPr>
               <p:cNvPr id="161" name="TextBox 160">
@@ -8452,8 +8452,8 @@
         </p:nvCxnSpPr>
         <p:spPr>
           <a:xfrm>
-            <a:off x="194673" y="2020046"/>
-            <a:ext cx="0" cy="5579731"/>
+            <a:off x="194673" y="2674620"/>
+            <a:ext cx="0" cy="4925157"/>
           </a:xfrm>
           <a:prstGeom prst="straightConnector1">
             <a:avLst/>
@@ -8480,6 +8480,44 @@
           </a:fontRef>
         </p:style>
       </p:cxnSp>
+      <p:sp>
+        <p:nvSpPr>
+          <p:cNvPr id="97" name="TextBox 96">
+            <a:extLst>
+              <a:ext uri="{FF2B5EF4-FFF2-40B4-BE49-F238E27FC236}">
+                <a16:creationId xmlns:a16="http://schemas.microsoft.com/office/drawing/2014/main" id="{138E8D67-2090-4434-995E-7A66AEA435C5}"/>
+              </a:ext>
+            </a:extLst>
+          </p:cNvPr>
+          <p:cNvSpPr txBox="1"/>
+          <p:nvPr/>
+        </p:nvSpPr>
+        <p:spPr>
+          <a:xfrm rot="16200000">
+            <a:off x="-168333" y="2125367"/>
+            <a:ext cx="719108" cy="369332"/>
+          </a:xfrm>
+          <a:prstGeom prst="rect">
+            <a:avLst/>
+          </a:prstGeom>
+          <a:noFill/>
+        </p:spPr>
+        <p:txBody>
+          <a:bodyPr wrap="none" rtlCol="0">
+            <a:spAutoFit/>
+          </a:bodyPr>
+          <a:lstStyle/>
+          <a:p>
+            <a:r>
+              <a:rPr lang="en-US" b="1" dirty="0">
+                <a:latin typeface="Arial" panose="020B0604020202020204" pitchFamily="34" charset="0"/>
+                <a:cs typeface="Arial" panose="020B0604020202020204" pitchFamily="34" charset="0"/>
+              </a:rPr>
+              <a:t>Time</a:t>
+            </a:r>
+          </a:p>
+        </p:txBody>
+      </p:sp>
     </p:spTree>
     <p:extLst>
       <p:ext uri="{BB962C8B-B14F-4D97-AF65-F5344CB8AC3E}">
@@ -11716,8 +11754,8 @@
           </a:fontRef>
         </p:style>
       </p:cxnSp>
-      <mc:AlternateContent xmlns:mc="http://schemas.openxmlformats.org/markup-compatibility/2006">
-        <mc:Choice xmlns:a14="http://schemas.microsoft.com/office/drawing/2010/main" Requires="a14">
+      <mc:AlternateContent xmlns:mc="http://schemas.openxmlformats.org/markup-compatibility/2006" xmlns:a14="http://schemas.microsoft.com/office/drawing/2010/main">
+        <mc:Choice Requires="a14">
           <p:sp>
             <p:nvSpPr>
               <p:cNvPr id="58" name="TextBox 57">
@@ -11768,7 +11806,7 @@
             </p:txBody>
           </p:sp>
         </mc:Choice>
-        <mc:Fallback>
+        <mc:Fallback xmlns="">
           <p:sp>
             <p:nvSpPr>
               <p:cNvPr id="58" name="TextBox 57">
@@ -12788,10 +12826,10 @@
       </p:sp>
       <p:cxnSp>
         <p:nvCxnSpPr>
-          <p:cNvPr id="86" name="Straight Arrow Connector 85">
-            <a:extLst>
-              <a:ext uri="{FF2B5EF4-FFF2-40B4-BE49-F238E27FC236}">
-                <a16:creationId xmlns:a16="http://schemas.microsoft.com/office/drawing/2014/main" id="{0F6078A7-E715-4DC5-AC33-4FBA105A4E4E}"/>
+          <p:cNvPr id="87" name="Straight Arrow Connector 86">
+            <a:extLst>
+              <a:ext uri="{FF2B5EF4-FFF2-40B4-BE49-F238E27FC236}">
+                <a16:creationId xmlns:a16="http://schemas.microsoft.com/office/drawing/2014/main" id="{86FF2D49-550E-480C-BCEB-0B736ED80B19}"/>
               </a:ext>
             </a:extLst>
           </p:cNvPr>
@@ -12802,8 +12840,8 @@
         </p:nvCxnSpPr>
         <p:spPr>
           <a:xfrm>
-            <a:off x="194673" y="2020046"/>
-            <a:ext cx="0" cy="5579731"/>
+            <a:off x="194673" y="2674620"/>
+            <a:ext cx="0" cy="4925157"/>
           </a:xfrm>
           <a:prstGeom prst="straightConnector1">
             <a:avLst/>
@@ -12830,6 +12868,44 @@
           </a:fontRef>
         </p:style>
       </p:cxnSp>
+      <p:sp>
+        <p:nvSpPr>
+          <p:cNvPr id="88" name="TextBox 87">
+            <a:extLst>
+              <a:ext uri="{FF2B5EF4-FFF2-40B4-BE49-F238E27FC236}">
+                <a16:creationId xmlns:a16="http://schemas.microsoft.com/office/drawing/2014/main" id="{085A75CA-F317-46FE-BBB4-652D1DF76D37}"/>
+              </a:ext>
+            </a:extLst>
+          </p:cNvPr>
+          <p:cNvSpPr txBox="1"/>
+          <p:nvPr/>
+        </p:nvSpPr>
+        <p:spPr>
+          <a:xfrm rot="16200000">
+            <a:off x="-168333" y="2125367"/>
+            <a:ext cx="719108" cy="369332"/>
+          </a:xfrm>
+          <a:prstGeom prst="rect">
+            <a:avLst/>
+          </a:prstGeom>
+          <a:noFill/>
+        </p:spPr>
+        <p:txBody>
+          <a:bodyPr wrap="none" rtlCol="0">
+            <a:spAutoFit/>
+          </a:bodyPr>
+          <a:lstStyle/>
+          <a:p>
+            <a:r>
+              <a:rPr lang="en-US" b="1" dirty="0">
+                <a:latin typeface="Arial" panose="020B0604020202020204" pitchFamily="34" charset="0"/>
+                <a:cs typeface="Arial" panose="020B0604020202020204" pitchFamily="34" charset="0"/>
+              </a:rPr>
+              <a:t>Time</a:t>
+            </a:r>
+          </a:p>
+        </p:txBody>
+      </p:sp>
     </p:spTree>
     <p:extLst>
       <p:ext uri="{BB962C8B-B14F-4D97-AF65-F5344CB8AC3E}">
